--- a/src/test/java/com/uc/ppt/file/output.pptx
+++ b/src/test/java/com/uc/ppt/file/output.pptx
@@ -3681,43 +3681,6 @@
         <p:nvPr/>
       </p:nvGrpSpPr>
       <p:grpSpPr/>
-      <p:sp>
-        <p:nvSpPr>
-          <p:cNvPr id="2" name="文本框 1"/>
-          <p:cNvSpPr txBox="1"/>
-          <p:nvPr/>
-        </p:nvSpPr>
-        <p:spPr>
-          <a:xfrm>
-            <a:off x="3489325" y="481330"/>
-            <a:ext cx="2291080" cy="1444625"/>
-          </a:xfrm>
-          <a:prstGeom prst="rect">
-            <a:avLst/>
-          </a:prstGeom>
-          <a:noFill/>
-          <a:ln cmpd="sng" w="12700">
-            <a:solidFill>
-              <a:schemeClr val="accent1">
-                <a:shade val="50000"/>
-              </a:schemeClr>
-            </a:solidFill>
-            <a:prstDash val="solid"/>
-          </a:ln>
-        </p:spPr>
-        <p:txBody>
-          <a:bodyPr anchor="t" anchorCtr="0" rtlCol="0" wrap="square">
-            <a:noAutofit/>
-          </a:bodyPr>
-          <a:p>
-            <a:r>
-              <a:rPr altLang="zh-CN" lang="en-US"/>
-              <a:t>${imgChart2}</a:t>
-            </a:r>
-            <a:endParaRPr altLang="zh-CN" lang="en-US"/>
-          </a:p>
-        </p:txBody>
-      </p:sp>
       <p:pic>
         <p:nvPicPr>
           <p:cNvPr name="Picture 3" id="3"/>
@@ -4304,35 +4267,6 @@
         <p:nvPr/>
       </p:nvGrpSpPr>
       <p:grpSpPr/>
-      <p:sp>
-        <p:nvSpPr>
-          <p:cNvPr id="4" name="文本框 3"/>
-          <p:cNvSpPr txBox="1"/>
-          <p:nvPr/>
-        </p:nvSpPr>
-        <p:spPr>
-          <a:xfrm>
-            <a:off x="2567305" y="1288415"/>
-            <a:ext cx="4064000" cy="368300"/>
-          </a:xfrm>
-          <a:prstGeom prst="rect">
-            <a:avLst/>
-          </a:prstGeom>
-          <a:noFill/>
-        </p:spPr>
-        <p:txBody>
-          <a:bodyPr rtlCol="0" wrap="square">
-            <a:spAutoFit/>
-          </a:bodyPr>
-          <a:p>
-            <a:r>
-              <a:rPr altLang="zh-CN" lang="en-US"/>
-              <a:t>${sankeyUserFlow}</a:t>
-            </a:r>
-            <a:endParaRPr altLang="zh-CN" lang="en-US"/>
-          </a:p>
-        </p:txBody>
-      </p:sp>
     </p:spTree>
   </p:cSld>
   <p:clrMapOvr>
